--- a/EP3/apresentação/slides.pptx
+++ b/EP3/apresentação/slides.pptx
@@ -5,7 +5,7 @@
     <p:sldMasterId id="2147483699" r:id="rId1"/>
   </p:sldMasterIdLst>
   <p:notesMasterIdLst>
-    <p:notesMasterId r:id="rId8"/>
+    <p:notesMasterId r:id="rId13"/>
   </p:notesMasterIdLst>
   <p:sldIdLst>
     <p:sldId id="256" r:id="rId2"/>
@@ -14,6 +14,11 @@
     <p:sldId id="261" r:id="rId5"/>
     <p:sldId id="271" r:id="rId6"/>
     <p:sldId id="272" r:id="rId7"/>
+    <p:sldId id="274" r:id="rId8"/>
+    <p:sldId id="275" r:id="rId9"/>
+    <p:sldId id="276" r:id="rId10"/>
+    <p:sldId id="277" r:id="rId11"/>
+    <p:sldId id="278" r:id="rId12"/>
   </p:sldIdLst>
   <p:sldSz cx="12192000" cy="6858000"/>
   <p:notesSz cx="6858000" cy="9144000"/>
@@ -202,7 +207,7 @@
           <a:p>
             <a:fld id="{FCB1DEBD-122D-9B4C-8A0B-868281EF4485}" type="datetimeFigureOut">
               <a:rPr lang="pt-BR" smtClean="0"/>
-              <a:t>31/05/2025</a:t>
+              <a:t>01/06/2025</a:t>
             </a:fld>
             <a:endParaRPr lang="pt-BR"/>
           </a:p>
@@ -622,7 +627,7 @@
           <a:p>
             <a:fld id="{C128FA71-3A18-48C0-980F-4B68F7F63042}" type="datetime1">
               <a:rPr lang="en-US" smtClean="0"/>
-              <a:t>5/31/25</a:t>
+              <a:t>6/1/25</a:t>
             </a:fld>
             <a:endParaRPr lang="en-US"/>
           </a:p>
@@ -830,7 +835,7 @@
           <a:p>
             <a:fld id="{7104EDB3-C0E8-45F8-9E1D-1B6C8D1880C0}" type="datetime1">
               <a:rPr lang="en-US" smtClean="0"/>
-              <a:t>5/31/25</a:t>
+              <a:t>6/1/25</a:t>
             </a:fld>
             <a:endParaRPr lang="en-US"/>
           </a:p>
@@ -1040,7 +1045,7 @@
           <a:p>
             <a:fld id="{9CF0EC4B-54ED-4041-B552-9BA760FA3DBA}" type="datetime1">
               <a:rPr lang="en-US" smtClean="0"/>
-              <a:t>5/31/25</a:t>
+              <a:t>6/1/25</a:t>
             </a:fld>
             <a:endParaRPr lang="en-US"/>
           </a:p>
@@ -1238,7 +1243,7 @@
           <a:p>
             <a:fld id="{51C1210E-201E-4473-82AC-2466F5386C38}" type="datetime1">
               <a:rPr lang="en-US" smtClean="0"/>
-              <a:t>5/31/25</a:t>
+              <a:t>6/1/25</a:t>
             </a:fld>
             <a:endParaRPr lang="en-US"/>
           </a:p>
@@ -1516,7 +1521,7 @@
           <a:p>
             <a:fld id="{B01EA198-6CAB-4B8F-B93F-1F9C8C4B6CE7}" type="datetime1">
               <a:rPr lang="en-US" smtClean="0"/>
-              <a:t>5/31/25</a:t>
+              <a:t>6/1/25</a:t>
             </a:fld>
             <a:endParaRPr lang="en-US"/>
           </a:p>
@@ -1788,7 +1793,7 @@
           <a:p>
             <a:fld id="{CA06041F-4525-44D5-AA4F-332294BF1F56}" type="datetime1">
               <a:rPr lang="en-US" smtClean="0"/>
-              <a:t>5/31/25</a:t>
+              <a:t>6/1/25</a:t>
             </a:fld>
             <a:endParaRPr lang="en-US"/>
           </a:p>
@@ -2212,7 +2217,7 @@
           <a:p>
             <a:fld id="{F9557091-BBDF-4EB9-BA6B-2BB67AC4FC0F}" type="datetime1">
               <a:rPr lang="en-US" smtClean="0"/>
-              <a:t>5/31/25</a:t>
+              <a:t>6/1/25</a:t>
             </a:fld>
             <a:endParaRPr lang="en-US"/>
           </a:p>
@@ -2353,7 +2358,7 @@
           <a:p>
             <a:fld id="{2D6B226B-77A6-410C-9796-083F278E0125}" type="datetime1">
               <a:rPr lang="en-US" smtClean="0"/>
-              <a:t>5/31/25</a:t>
+              <a:t>6/1/25</a:t>
             </a:fld>
             <a:endParaRPr lang="en-US"/>
           </a:p>
@@ -2466,7 +2471,7 @@
           <a:p>
             <a:fld id="{A23A578B-D289-4C40-8593-3D356C49DA58}" type="datetime1">
               <a:rPr lang="en-US" smtClean="0"/>
-              <a:t>5/31/25</a:t>
+              <a:t>6/1/25</a:t>
             </a:fld>
             <a:endParaRPr lang="en-US"/>
           </a:p>
@@ -2785,7 +2790,7 @@
           <a:p>
             <a:fld id="{713DFAE3-14DB-48A7-A80F-80DDB072CE3D}" type="datetime1">
               <a:rPr lang="en-US" smtClean="0"/>
-              <a:t>5/31/25</a:t>
+              <a:t>6/1/25</a:t>
             </a:fld>
             <a:endParaRPr lang="en-US"/>
           </a:p>
@@ -3079,7 +3084,7 @@
           <a:p>
             <a:fld id="{92C5EAEF-6478-4102-8F5D-A5FE9FC97ACB}" type="datetime1">
               <a:rPr lang="en-US" smtClean="0"/>
-              <a:t>5/31/25</a:t>
+              <a:t>6/1/25</a:t>
             </a:fld>
             <a:endParaRPr lang="en-US"/>
           </a:p>
@@ -3320,7 +3325,7 @@
           <a:p>
             <a:fld id="{67F45AC6-C491-4585-A584-9CE2AF7D5500}" type="datetime1">
               <a:rPr lang="en-US" smtClean="0"/>
-              <a:t>5/31/25</a:t>
+              <a:t>6/1/25</a:t>
             </a:fld>
             <a:endParaRPr lang="en-US"/>
           </a:p>
@@ -4011,6 +4016,423 @@
 </p:sld>
 </file>
 
+<file path=ppt/slides/slide10.xml><?xml version="1.0" encoding="utf-8"?>
+<p:sld xmlns:a="http://schemas.openxmlformats.org/drawingml/2006/main" xmlns:r="http://schemas.openxmlformats.org/officeDocument/2006/relationships" xmlns:p="http://schemas.openxmlformats.org/presentationml/2006/main">
+  <p:cSld>
+    <p:spTree>
+      <p:nvGrpSpPr>
+        <p:cNvPr id="1" name=""/>
+        <p:cNvGrpSpPr/>
+        <p:nvPr/>
+      </p:nvGrpSpPr>
+      <p:grpSpPr>
+        <a:xfrm>
+          <a:off x="0" y="0"/>
+          <a:ext cx="0" cy="0"/>
+          <a:chOff x="0" y="0"/>
+          <a:chExt cx="0" cy="0"/>
+        </a:xfrm>
+      </p:grpSpPr>
+      <p:sp>
+        <p:nvSpPr>
+          <p:cNvPr id="2" name="Título 1">
+            <a:extLst>
+              <a:ext uri="{FF2B5EF4-FFF2-40B4-BE49-F238E27FC236}">
+                <a16:creationId xmlns:a16="http://schemas.microsoft.com/office/drawing/2014/main" id="{CC8089CE-467D-F616-182F-F3429EDDCFC8}"/>
+              </a:ext>
+            </a:extLst>
+          </p:cNvPr>
+          <p:cNvSpPr>
+            <a:spLocks noGrp="1"/>
+          </p:cNvSpPr>
+          <p:nvPr>
+            <p:ph type="title"/>
+          </p:nvPr>
+        </p:nvSpPr>
+        <p:spPr/>
+        <p:txBody>
+          <a:bodyPr/>
+          <a:lstStyle/>
+          <a:p>
+            <a:r>
+              <a:rPr lang="pt-BR" dirty="0"/>
+              <a:t>Trace </a:t>
+            </a:r>
+            <a:r>
+              <a:rPr lang="pt-BR" dirty="0" err="1"/>
+              <a:t>Worst-fit</a:t>
+            </a:r>
+            <a:endParaRPr lang="pt-BR" dirty="0"/>
+          </a:p>
+        </p:txBody>
+      </p:sp>
+      <p:sp>
+        <p:nvSpPr>
+          <p:cNvPr id="3" name="Espaço Reservado para Conteúdo 2">
+            <a:extLst>
+              <a:ext uri="{FF2B5EF4-FFF2-40B4-BE49-F238E27FC236}">
+                <a16:creationId xmlns:a16="http://schemas.microsoft.com/office/drawing/2014/main" id="{90DBA55B-6F5A-2DED-9574-FE692F115147}"/>
+              </a:ext>
+            </a:extLst>
+          </p:cNvPr>
+          <p:cNvSpPr>
+            <a:spLocks noGrp="1"/>
+          </p:cNvSpPr>
+          <p:nvPr>
+            <p:ph idx="1"/>
+          </p:nvPr>
+        </p:nvSpPr>
+        <p:spPr>
+          <a:xfrm>
+            <a:off x="612648" y="1114768"/>
+            <a:ext cx="6389426" cy="5475217"/>
+          </a:xfrm>
+        </p:spPr>
+        <p:txBody>
+          <a:bodyPr>
+            <a:normAutofit fontScale="92500" lnSpcReduction="10000"/>
+          </a:bodyPr>
+          <a:lstStyle/>
+          <a:p>
+            <a:pPr>
+              <a:buFont typeface="Wingdings" pitchFamily="2" charset="2"/>
+              <a:buChar char="§"/>
+            </a:pPr>
+            <a:r>
+              <a:rPr lang="pt-BR" dirty="0"/>
+              <a:t>Este trace tem uma </a:t>
+            </a:r>
+            <a:r>
+              <a:rPr lang="pt-BR" b="1" dirty="0"/>
+              <a:t>etapa inicial </a:t>
+            </a:r>
+            <a:r>
+              <a:rPr lang="pt-BR" dirty="0"/>
+              <a:t>em que cria um </a:t>
+            </a:r>
+            <a:r>
+              <a:rPr lang="pt-BR" b="1" dirty="0"/>
+              <a:t>cenário ideal para o </a:t>
+            </a:r>
+            <a:r>
+              <a:rPr lang="pt-BR" b="1" dirty="0" err="1"/>
+              <a:t>worst-fit</a:t>
+            </a:r>
+            <a:r>
+              <a:rPr lang="pt-BR" dirty="0"/>
+              <a:t>: algumas requisições menores são feitas, e logo em seguida pede-se um espaço grande que, somado a essas menores, totaliza o maior espaço da memória inicialmente</a:t>
+            </a:r>
+          </a:p>
+          <a:p>
+            <a:pPr>
+              <a:buFont typeface="Wingdings" pitchFamily="2" charset="2"/>
+              <a:buChar char="§"/>
+            </a:pPr>
+            <a:r>
+              <a:rPr lang="pt-BR" dirty="0"/>
+              <a:t>Ao mesmo tempo, pelo </a:t>
+            </a:r>
+            <a:r>
+              <a:rPr lang="pt-BR" b="1" dirty="0" err="1"/>
+              <a:t>best-fit</a:t>
+            </a:r>
+            <a:r>
+              <a:rPr lang="pt-BR" dirty="0"/>
+              <a:t>, essas requisições menores espalham </a:t>
+            </a:r>
+            <a:r>
+              <a:rPr lang="pt-BR" b="1" dirty="0"/>
+              <a:t>espaços livres pequenos demais</a:t>
+            </a:r>
+            <a:r>
+              <a:rPr lang="pt-BR" dirty="0"/>
+              <a:t> pela memória. Ao fim do trace, tais espaços são requisitados, e enquanto o </a:t>
+            </a:r>
+            <a:r>
+              <a:rPr lang="pt-BR" dirty="0" err="1"/>
+              <a:t>worst-fit</a:t>
+            </a:r>
+            <a:r>
+              <a:rPr lang="pt-BR" dirty="0"/>
+              <a:t> os têm disponíveis, o </a:t>
+            </a:r>
+            <a:r>
+              <a:rPr lang="pt-BR" dirty="0" err="1"/>
+              <a:t>best</a:t>
+            </a:r>
+            <a:r>
+              <a:rPr lang="pt-BR" dirty="0"/>
+              <a:t> os fragmentou, e ocorre falha neste último</a:t>
+            </a:r>
+          </a:p>
+          <a:p>
+            <a:pPr>
+              <a:buFont typeface="Wingdings" pitchFamily="2" charset="2"/>
+              <a:buChar char="§"/>
+            </a:pPr>
+            <a:r>
+              <a:rPr lang="pt-BR" dirty="0"/>
+              <a:t>Logo, enquanto o </a:t>
+            </a:r>
+            <a:r>
+              <a:rPr lang="pt-BR" dirty="0" err="1"/>
+              <a:t>worst-fit</a:t>
+            </a:r>
+            <a:r>
+              <a:rPr lang="pt-BR" dirty="0"/>
+              <a:t> tem aqui em parte um cenário ideal, a </a:t>
+            </a:r>
+            <a:r>
+              <a:rPr lang="pt-BR" b="1" dirty="0"/>
+              <a:t>hipótese do </a:t>
+            </a:r>
+            <a:r>
+              <a:rPr lang="pt-BR" b="1" dirty="0" err="1"/>
+              <a:t>best-fit</a:t>
+            </a:r>
+            <a:r>
+              <a:rPr lang="pt-BR" dirty="0"/>
+              <a:t>, de deixar grandes espaços para grandes requisições, </a:t>
+            </a:r>
+            <a:r>
+              <a:rPr lang="pt-BR" b="1" dirty="0"/>
+              <a:t>não é tão aproveitada</a:t>
+            </a:r>
+            <a:r>
+              <a:rPr lang="pt-BR" dirty="0"/>
+              <a:t>, e os espaços fragmentados fazem mais diferença</a:t>
+            </a:r>
+          </a:p>
+        </p:txBody>
+      </p:sp>
+      <p:pic>
+        <p:nvPicPr>
+          <p:cNvPr id="6" name="Imagem 5">
+            <a:extLst>
+              <a:ext uri="{FF2B5EF4-FFF2-40B4-BE49-F238E27FC236}">
+                <a16:creationId xmlns:a16="http://schemas.microsoft.com/office/drawing/2014/main" id="{C8440B78-9C7F-87EA-3AD4-88AE95ACAC1B}"/>
+              </a:ext>
+            </a:extLst>
+          </p:cNvPr>
+          <p:cNvPicPr>
+            <a:picLocks noChangeAspect="1"/>
+          </p:cNvPicPr>
+          <p:nvPr/>
+        </p:nvPicPr>
+        <p:blipFill>
+          <a:blip r:embed="rId2"/>
+          <a:stretch>
+            <a:fillRect/>
+          </a:stretch>
+        </p:blipFill>
+        <p:spPr>
+          <a:xfrm>
+            <a:off x="7697732" y="323086"/>
+            <a:ext cx="3951027" cy="3240730"/>
+          </a:xfrm>
+          <a:prstGeom prst="rect">
+            <a:avLst/>
+          </a:prstGeom>
+        </p:spPr>
+      </p:pic>
+      <p:pic>
+        <p:nvPicPr>
+          <p:cNvPr id="8" name="Imagem 7">
+            <a:extLst>
+              <a:ext uri="{FF2B5EF4-FFF2-40B4-BE49-F238E27FC236}">
+                <a16:creationId xmlns:a16="http://schemas.microsoft.com/office/drawing/2014/main" id="{615E5F59-54A2-33F0-DBC8-F511CB8E66B6}"/>
+              </a:ext>
+            </a:extLst>
+          </p:cNvPr>
+          <p:cNvPicPr>
+            <a:picLocks noChangeAspect="1"/>
+          </p:cNvPicPr>
+          <p:nvPr/>
+        </p:nvPicPr>
+        <p:blipFill>
+          <a:blip r:embed="rId3"/>
+          <a:stretch>
+            <a:fillRect/>
+          </a:stretch>
+        </p:blipFill>
+        <p:spPr>
+          <a:xfrm>
+            <a:off x="7697732" y="3429000"/>
+            <a:ext cx="3951027" cy="3341222"/>
+          </a:xfrm>
+          <a:prstGeom prst="rect">
+            <a:avLst/>
+          </a:prstGeom>
+        </p:spPr>
+      </p:pic>
+    </p:spTree>
+    <p:extLst>
+      <p:ext uri="{BB962C8B-B14F-4D97-AF65-F5344CB8AC3E}">
+        <p14:creationId xmlns:p14="http://schemas.microsoft.com/office/powerpoint/2010/main" val="19282596"/>
+      </p:ext>
+    </p:extLst>
+  </p:cSld>
+  <p:clrMapOvr>
+    <a:masterClrMapping/>
+  </p:clrMapOvr>
+</p:sld>
+</file>
+
+<file path=ppt/slides/slide11.xml><?xml version="1.0" encoding="utf-8"?>
+<p:sld xmlns:a="http://schemas.openxmlformats.org/drawingml/2006/main" xmlns:r="http://schemas.openxmlformats.org/officeDocument/2006/relationships" xmlns:p="http://schemas.openxmlformats.org/presentationml/2006/main">
+  <p:cSld>
+    <p:spTree>
+      <p:nvGrpSpPr>
+        <p:cNvPr id="1" name=""/>
+        <p:cNvGrpSpPr/>
+        <p:nvPr/>
+      </p:nvGrpSpPr>
+      <p:grpSpPr>
+        <a:xfrm>
+          <a:off x="0" y="0"/>
+          <a:ext cx="0" cy="0"/>
+          <a:chOff x="0" y="0"/>
+          <a:chExt cx="0" cy="0"/>
+        </a:xfrm>
+      </p:grpSpPr>
+      <p:sp>
+        <p:nvSpPr>
+          <p:cNvPr id="2" name="Título 1">
+            <a:extLst>
+              <a:ext uri="{FF2B5EF4-FFF2-40B4-BE49-F238E27FC236}">
+                <a16:creationId xmlns:a16="http://schemas.microsoft.com/office/drawing/2014/main" id="{CC8089CE-467D-F616-182F-F3429EDDCFC8}"/>
+              </a:ext>
+            </a:extLst>
+          </p:cNvPr>
+          <p:cNvSpPr>
+            <a:spLocks noGrp="1"/>
+          </p:cNvSpPr>
+          <p:nvPr>
+            <p:ph type="title"/>
+          </p:nvPr>
+        </p:nvSpPr>
+        <p:spPr/>
+        <p:txBody>
+          <a:bodyPr/>
+          <a:lstStyle/>
+          <a:p>
+            <a:r>
+              <a:rPr lang="pt-BR" dirty="0"/>
+              <a:t>Conclusão</a:t>
+            </a:r>
+          </a:p>
+        </p:txBody>
+      </p:sp>
+      <p:sp>
+        <p:nvSpPr>
+          <p:cNvPr id="3" name="Espaço Reservado para Conteúdo 2">
+            <a:extLst>
+              <a:ext uri="{FF2B5EF4-FFF2-40B4-BE49-F238E27FC236}">
+                <a16:creationId xmlns:a16="http://schemas.microsoft.com/office/drawing/2014/main" id="{90DBA55B-6F5A-2DED-9574-FE692F115147}"/>
+              </a:ext>
+            </a:extLst>
+          </p:cNvPr>
+          <p:cNvSpPr>
+            <a:spLocks noGrp="1"/>
+          </p:cNvSpPr>
+          <p:nvPr>
+            <p:ph idx="1"/>
+          </p:nvPr>
+        </p:nvSpPr>
+        <p:spPr>
+          <a:xfrm>
+            <a:off x="612647" y="1114769"/>
+            <a:ext cx="10653579" cy="5286032"/>
+          </a:xfrm>
+        </p:spPr>
+        <p:txBody>
+          <a:bodyPr>
+            <a:normAutofit/>
+          </a:bodyPr>
+          <a:lstStyle/>
+          <a:p>
+            <a:pPr>
+              <a:buFont typeface="Wingdings" pitchFamily="2" charset="2"/>
+              <a:buChar char="§"/>
+            </a:pPr>
+            <a:r>
+              <a:rPr lang="pt-BR" dirty="0"/>
+              <a:t>Pelos últimos slides, é visível que, conhecendo os algoritmos, podemos elaborar circunstâncias que configurem cenários ideais ou ruins, e em situações reais qualquer um dos dois pode acabar ocorrendo</a:t>
+            </a:r>
+          </a:p>
+          <a:p>
+            <a:pPr>
+              <a:buFont typeface="Wingdings" pitchFamily="2" charset="2"/>
+              <a:buChar char="§"/>
+            </a:pPr>
+            <a:r>
+              <a:rPr lang="pt-BR" dirty="0"/>
+              <a:t>Por conta disso, </a:t>
+            </a:r>
+            <a:r>
+              <a:rPr lang="pt-BR" b="1" dirty="0"/>
+              <a:t>nenhum dos algoritmos é universalmente melhor</a:t>
+            </a:r>
+            <a:r>
+              <a:rPr lang="pt-BR" dirty="0"/>
+              <a:t>, e é conveniente escolher aquele que, </a:t>
+            </a:r>
+            <a:r>
+              <a:rPr lang="pt-BR" b="1" dirty="0"/>
+              <a:t>em média, melhor atende o propósito da aplicação</a:t>
+            </a:r>
+            <a:r>
+              <a:rPr lang="pt-BR" dirty="0"/>
+              <a:t>, seja este o tempo de execução, quantidade de requisições atendidas, ou um meio termo entre os dois</a:t>
+            </a:r>
+          </a:p>
+          <a:p>
+            <a:pPr>
+              <a:buFont typeface="Wingdings" pitchFamily="2" charset="2"/>
+              <a:buChar char="§"/>
+            </a:pPr>
+            <a:r>
+              <a:rPr lang="pt-BR" dirty="0"/>
+              <a:t>Em grande parte, mesmo com uma quantidade baixa de arquivos de teste, pudemos observar uma </a:t>
+            </a:r>
+            <a:r>
+              <a:rPr lang="pt-BR" b="1" dirty="0"/>
+              <a:t>efetivação na prática do que prevíamos pela teoria</a:t>
+            </a:r>
+          </a:p>
+          <a:p>
+            <a:pPr>
+              <a:buFont typeface="Wingdings" pitchFamily="2" charset="2"/>
+              <a:buChar char="§"/>
+            </a:pPr>
+            <a:r>
+              <a:rPr lang="pt-BR" dirty="0"/>
+              <a:t>De modo geral, pelos testes apresentados e overheads discutidos para cada algoritmo, é possível ter uma noção bem estruturada sobre os </a:t>
+            </a:r>
+            <a:r>
+              <a:rPr lang="pt-BR" b="1" dirty="0" err="1"/>
+              <a:t>tradeoffs</a:t>
+            </a:r>
+            <a:r>
+              <a:rPr lang="pt-BR" dirty="0"/>
+              <a:t> que devem ser considerados, bem como algumas das razões que fazem com que estes ocorram</a:t>
+            </a:r>
+          </a:p>
+        </p:txBody>
+      </p:sp>
+    </p:spTree>
+    <p:extLst>
+      <p:ext uri="{BB962C8B-B14F-4D97-AF65-F5344CB8AC3E}">
+        <p14:creationId xmlns:p14="http://schemas.microsoft.com/office/powerpoint/2010/main" val="3579525260"/>
+      </p:ext>
+    </p:extLst>
+  </p:cSld>
+  <p:clrMapOvr>
+    <a:masterClrMapping/>
+  </p:clrMapOvr>
+</p:sld>
+</file>
+
 <file path=ppt/slides/slide2.xml><?xml version="1.0" encoding="utf-8"?>
 <p:sld xmlns:a="http://schemas.openxmlformats.org/drawingml/2006/main" xmlns:r="http://schemas.openxmlformats.org/officeDocument/2006/relationships" xmlns:p="http://schemas.openxmlformats.org/presentationml/2006/main">
   <p:cSld>
@@ -5075,34 +5497,42 @@
             </a:pPr>
             <a:r>
               <a:rPr lang="pt-BR" dirty="0"/>
-              <a:t>Tendo isso em mente, nos slides a seguir mostraremos os resultados de tempo e falhas dos experimentos realizados com cada arquivo de trace. Note que daremos mais ênfase à comparação de tempo entre </a:t>
-            </a:r>
-            <a:r>
-              <a:rPr lang="pt-BR" dirty="0" err="1"/>
+              <a:t>Tendo isso em mente, nos slides a seguir mostraremos os resultados de tempo e falhas dos experimentos realizados com cada arquivo de trace. Note que daremos mais ênfase à </a:t>
+            </a:r>
+            <a:r>
+              <a:rPr lang="pt-BR" b="1" dirty="0"/>
+              <a:t>comparação de tempo entre </a:t>
+            </a:r>
+            <a:r>
+              <a:rPr lang="pt-BR" b="1" dirty="0" err="1"/>
               <a:t>first</a:t>
             </a:r>
             <a:r>
-              <a:rPr lang="pt-BR" dirty="0"/>
+              <a:rPr lang="pt-BR" b="1" dirty="0"/>
               <a:t> e </a:t>
             </a:r>
             <a:r>
-              <a:rPr lang="pt-BR" dirty="0" err="1"/>
+              <a:rPr lang="pt-BR" b="1" dirty="0" err="1"/>
               <a:t>next</a:t>
             </a:r>
             <a:r>
               <a:rPr lang="pt-BR" dirty="0"/>
-              <a:t>, nos seus respectivos trace, e falhas entre </a:t>
-            </a:r>
-            <a:r>
-              <a:rPr lang="pt-BR" dirty="0" err="1"/>
+              <a:t>, nos seus respectivos trace, e </a:t>
+            </a:r>
+            <a:r>
+              <a:rPr lang="pt-BR" b="1" dirty="0"/>
+              <a:t>falhas entre </a:t>
+            </a:r>
+            <a:r>
+              <a:rPr lang="pt-BR" b="1" dirty="0" err="1"/>
               <a:t>best</a:t>
             </a:r>
             <a:r>
-              <a:rPr lang="pt-BR" dirty="0"/>
+              <a:rPr lang="pt-BR" b="1" dirty="0"/>
               <a:t> e </a:t>
             </a:r>
             <a:r>
-              <a:rPr lang="pt-BR" dirty="0" err="1"/>
+              <a:rPr lang="pt-BR" b="1" dirty="0" err="1"/>
               <a:t>worst</a:t>
             </a:r>
             <a:r>
@@ -5116,6 +5546,729 @@
     <p:extLst>
       <p:ext uri="{BB962C8B-B14F-4D97-AF65-F5344CB8AC3E}">
         <p14:creationId xmlns:p14="http://schemas.microsoft.com/office/powerpoint/2010/main" val="2187980867"/>
+      </p:ext>
+    </p:extLst>
+  </p:cSld>
+  <p:clrMapOvr>
+    <a:masterClrMapping/>
+  </p:clrMapOvr>
+</p:sld>
+</file>
+
+<file path=ppt/slides/slide7.xml><?xml version="1.0" encoding="utf-8"?>
+<p:sld xmlns:a="http://schemas.openxmlformats.org/drawingml/2006/main" xmlns:r="http://schemas.openxmlformats.org/officeDocument/2006/relationships" xmlns:p="http://schemas.openxmlformats.org/presentationml/2006/main">
+  <p:cSld>
+    <p:spTree>
+      <p:nvGrpSpPr>
+        <p:cNvPr id="1" name=""/>
+        <p:cNvGrpSpPr/>
+        <p:nvPr/>
+      </p:nvGrpSpPr>
+      <p:grpSpPr>
+        <a:xfrm>
+          <a:off x="0" y="0"/>
+          <a:ext cx="0" cy="0"/>
+          <a:chOff x="0" y="0"/>
+          <a:chExt cx="0" cy="0"/>
+        </a:xfrm>
+      </p:grpSpPr>
+      <p:sp>
+        <p:nvSpPr>
+          <p:cNvPr id="2" name="Título 1">
+            <a:extLst>
+              <a:ext uri="{FF2B5EF4-FFF2-40B4-BE49-F238E27FC236}">
+                <a16:creationId xmlns:a16="http://schemas.microsoft.com/office/drawing/2014/main" id="{CC8089CE-467D-F616-182F-F3429EDDCFC8}"/>
+              </a:ext>
+            </a:extLst>
+          </p:cNvPr>
+          <p:cNvSpPr>
+            <a:spLocks noGrp="1"/>
+          </p:cNvSpPr>
+          <p:nvPr>
+            <p:ph type="title"/>
+          </p:nvPr>
+        </p:nvSpPr>
+        <p:spPr/>
+        <p:txBody>
+          <a:bodyPr/>
+          <a:lstStyle/>
+          <a:p>
+            <a:r>
+              <a:rPr lang="pt-BR" dirty="0"/>
+              <a:t>Trace </a:t>
+            </a:r>
+            <a:r>
+              <a:rPr lang="pt-BR" dirty="0" err="1"/>
+              <a:t>First</a:t>
+            </a:r>
+            <a:r>
+              <a:rPr lang="pt-BR" dirty="0"/>
+              <a:t>-Fit</a:t>
+            </a:r>
+          </a:p>
+        </p:txBody>
+      </p:sp>
+      <p:sp>
+        <p:nvSpPr>
+          <p:cNvPr id="3" name="Espaço Reservado para Conteúdo 2">
+            <a:extLst>
+              <a:ext uri="{FF2B5EF4-FFF2-40B4-BE49-F238E27FC236}">
+                <a16:creationId xmlns:a16="http://schemas.microsoft.com/office/drawing/2014/main" id="{90DBA55B-6F5A-2DED-9574-FE692F115147}"/>
+              </a:ext>
+            </a:extLst>
+          </p:cNvPr>
+          <p:cNvSpPr>
+            <a:spLocks noGrp="1"/>
+          </p:cNvSpPr>
+          <p:nvPr>
+            <p:ph idx="1"/>
+          </p:nvPr>
+        </p:nvSpPr>
+        <p:spPr>
+          <a:xfrm>
+            <a:off x="612648" y="1114769"/>
+            <a:ext cx="6389426" cy="5286032"/>
+          </a:xfrm>
+        </p:spPr>
+        <p:txBody>
+          <a:bodyPr>
+            <a:normAutofit lnSpcReduction="10000"/>
+          </a:bodyPr>
+          <a:lstStyle/>
+          <a:p>
+            <a:pPr>
+              <a:buFont typeface="Wingdings" pitchFamily="2" charset="2"/>
+              <a:buChar char="§"/>
+            </a:pPr>
+            <a:r>
+              <a:rPr lang="pt-BR" dirty="0"/>
+              <a:t>Aqui, utilizamos um exemplo mais </a:t>
+            </a:r>
+            <a:r>
+              <a:rPr lang="pt-BR" dirty="0" err="1"/>
+              <a:t>minimal</a:t>
+            </a:r>
+            <a:r>
+              <a:rPr lang="pt-BR" dirty="0"/>
+              <a:t>, de modo que </a:t>
+            </a:r>
+            <a:r>
+              <a:rPr lang="pt-BR" b="1" dirty="0"/>
+              <a:t>não houve falha</a:t>
+            </a:r>
+            <a:r>
+              <a:rPr lang="pt-BR" dirty="0"/>
+              <a:t> em nenhum dos algoritmos. Assim, </a:t>
+            </a:r>
+            <a:r>
+              <a:rPr lang="pt-BR" dirty="0" err="1"/>
+              <a:t>best-fit</a:t>
+            </a:r>
+            <a:r>
+              <a:rPr lang="pt-BR" dirty="0"/>
+              <a:t> e </a:t>
+            </a:r>
+            <a:r>
+              <a:rPr lang="pt-BR" dirty="0" err="1"/>
+              <a:t>worst-fit</a:t>
+            </a:r>
+            <a:r>
+              <a:rPr lang="pt-BR" dirty="0"/>
+              <a:t> foram praticamente idênticos em tempo de execução</a:t>
+            </a:r>
+          </a:p>
+          <a:p>
+            <a:pPr>
+              <a:buFont typeface="Wingdings" pitchFamily="2" charset="2"/>
+              <a:buChar char="§"/>
+            </a:pPr>
+            <a:r>
+              <a:rPr lang="pt-BR" dirty="0"/>
+              <a:t>Criamos situações em que o </a:t>
+            </a:r>
+            <a:r>
+              <a:rPr lang="pt-BR" b="1" dirty="0" err="1"/>
+              <a:t>next-fit</a:t>
+            </a:r>
+            <a:r>
+              <a:rPr lang="pt-BR" dirty="0"/>
+              <a:t> precisou dar </a:t>
+            </a:r>
+            <a:r>
+              <a:rPr lang="pt-BR" b="1" dirty="0"/>
+              <a:t>quase uma volta completa</a:t>
+            </a:r>
+            <a:r>
+              <a:rPr lang="pt-BR" dirty="0"/>
+              <a:t> muitas vezes, primeiro escolhendo um valor só disponível no fim do </a:t>
+            </a:r>
+            <a:r>
+              <a:rPr lang="pt-BR" dirty="0" err="1"/>
+              <a:t>pgm</a:t>
+            </a:r>
+            <a:r>
+              <a:rPr lang="pt-BR" dirty="0"/>
+              <a:t>, depois um pouco antes, e assim por diante. Enquanto o </a:t>
+            </a:r>
+            <a:r>
+              <a:rPr lang="pt-BR" dirty="0" err="1"/>
+              <a:t>next</a:t>
+            </a:r>
+            <a:r>
+              <a:rPr lang="pt-BR" dirty="0"/>
+              <a:t> dava voltas grandes, o espaço livre ficava cada vez mais próximo do </a:t>
+            </a:r>
+            <a:r>
+              <a:rPr lang="pt-BR" dirty="0" err="1"/>
+              <a:t>first-fit</a:t>
+            </a:r>
+            <a:endParaRPr lang="pt-BR" dirty="0"/>
+          </a:p>
+          <a:p>
+            <a:pPr>
+              <a:buFont typeface="Wingdings" pitchFamily="2" charset="2"/>
+              <a:buChar char="§"/>
+            </a:pPr>
+            <a:r>
+              <a:rPr lang="pt-BR" dirty="0"/>
+              <a:t>Escolher uma situação em que o </a:t>
+            </a:r>
+            <a:r>
+              <a:rPr lang="pt-BR" dirty="0" err="1"/>
+              <a:t>first</a:t>
+            </a:r>
+            <a:r>
+              <a:rPr lang="pt-BR" dirty="0"/>
+              <a:t> é mais rápido envolve, normalmente, casos mais específicos como este, e ainda assim houve um desempenho apenas 25% melhor</a:t>
+            </a:r>
+          </a:p>
+        </p:txBody>
+      </p:sp>
+      <p:pic>
+        <p:nvPicPr>
+          <p:cNvPr id="5" name="Imagem 4">
+            <a:extLst>
+              <a:ext uri="{FF2B5EF4-FFF2-40B4-BE49-F238E27FC236}">
+                <a16:creationId xmlns:a16="http://schemas.microsoft.com/office/drawing/2014/main" id="{594B826D-D768-75B5-B88F-E9E0512574EB}"/>
+              </a:ext>
+            </a:extLst>
+          </p:cNvPr>
+          <p:cNvPicPr>
+            <a:picLocks noChangeAspect="1"/>
+          </p:cNvPicPr>
+          <p:nvPr/>
+        </p:nvPicPr>
+        <p:blipFill>
+          <a:blip r:embed="rId2"/>
+          <a:stretch>
+            <a:fillRect/>
+          </a:stretch>
+        </p:blipFill>
+        <p:spPr>
+          <a:xfrm>
+            <a:off x="7315200" y="548640"/>
+            <a:ext cx="4264152" cy="3602829"/>
+          </a:xfrm>
+          <a:prstGeom prst="rect">
+            <a:avLst/>
+          </a:prstGeom>
+        </p:spPr>
+      </p:pic>
+    </p:spTree>
+    <p:extLst>
+      <p:ext uri="{BB962C8B-B14F-4D97-AF65-F5344CB8AC3E}">
+        <p14:creationId xmlns:p14="http://schemas.microsoft.com/office/powerpoint/2010/main" val="4140666915"/>
+      </p:ext>
+    </p:extLst>
+  </p:cSld>
+  <p:clrMapOvr>
+    <a:masterClrMapping/>
+  </p:clrMapOvr>
+</p:sld>
+</file>
+
+<file path=ppt/slides/slide8.xml><?xml version="1.0" encoding="utf-8"?>
+<p:sld xmlns:a="http://schemas.openxmlformats.org/drawingml/2006/main" xmlns:r="http://schemas.openxmlformats.org/officeDocument/2006/relationships" xmlns:p="http://schemas.openxmlformats.org/presentationml/2006/main">
+  <p:cSld>
+    <p:spTree>
+      <p:nvGrpSpPr>
+        <p:cNvPr id="1" name=""/>
+        <p:cNvGrpSpPr/>
+        <p:nvPr/>
+      </p:nvGrpSpPr>
+      <p:grpSpPr>
+        <a:xfrm>
+          <a:off x="0" y="0"/>
+          <a:ext cx="0" cy="0"/>
+          <a:chOff x="0" y="0"/>
+          <a:chExt cx="0" cy="0"/>
+        </a:xfrm>
+      </p:grpSpPr>
+      <p:sp>
+        <p:nvSpPr>
+          <p:cNvPr id="2" name="Título 1">
+            <a:extLst>
+              <a:ext uri="{FF2B5EF4-FFF2-40B4-BE49-F238E27FC236}">
+                <a16:creationId xmlns:a16="http://schemas.microsoft.com/office/drawing/2014/main" id="{CC8089CE-467D-F616-182F-F3429EDDCFC8}"/>
+              </a:ext>
+            </a:extLst>
+          </p:cNvPr>
+          <p:cNvSpPr>
+            <a:spLocks noGrp="1"/>
+          </p:cNvSpPr>
+          <p:nvPr>
+            <p:ph type="title"/>
+          </p:nvPr>
+        </p:nvSpPr>
+        <p:spPr/>
+        <p:txBody>
+          <a:bodyPr/>
+          <a:lstStyle/>
+          <a:p>
+            <a:r>
+              <a:rPr lang="pt-BR" dirty="0"/>
+              <a:t>Trace Next-</a:t>
+            </a:r>
+            <a:r>
+              <a:rPr lang="pt-BR" dirty="0" err="1"/>
+              <a:t>fit</a:t>
+            </a:r>
+            <a:endParaRPr lang="pt-BR" dirty="0"/>
+          </a:p>
+        </p:txBody>
+      </p:sp>
+      <p:sp>
+        <p:nvSpPr>
+          <p:cNvPr id="3" name="Espaço Reservado para Conteúdo 2">
+            <a:extLst>
+              <a:ext uri="{FF2B5EF4-FFF2-40B4-BE49-F238E27FC236}">
+                <a16:creationId xmlns:a16="http://schemas.microsoft.com/office/drawing/2014/main" id="{90DBA55B-6F5A-2DED-9574-FE692F115147}"/>
+              </a:ext>
+            </a:extLst>
+          </p:cNvPr>
+          <p:cNvSpPr>
+            <a:spLocks noGrp="1"/>
+          </p:cNvSpPr>
+          <p:nvPr>
+            <p:ph idx="1"/>
+          </p:nvPr>
+        </p:nvSpPr>
+        <p:spPr>
+          <a:xfrm>
+            <a:off x="612648" y="1114768"/>
+            <a:ext cx="6389426" cy="5475217"/>
+          </a:xfrm>
+        </p:spPr>
+        <p:txBody>
+          <a:bodyPr>
+            <a:normAutofit fontScale="92500" lnSpcReduction="10000"/>
+          </a:bodyPr>
+          <a:lstStyle/>
+          <a:p>
+            <a:pPr>
+              <a:buFont typeface="Wingdings" pitchFamily="2" charset="2"/>
+              <a:buChar char="§"/>
+            </a:pPr>
+            <a:r>
+              <a:rPr lang="pt-BR" dirty="0"/>
+              <a:t>Este trace é maximal, requisitando toda a memória disponível</a:t>
+            </a:r>
+          </a:p>
+          <a:p>
+            <a:pPr>
+              <a:buFont typeface="Wingdings" pitchFamily="2" charset="2"/>
+              <a:buChar char="§"/>
+            </a:pPr>
+            <a:r>
+              <a:rPr lang="pt-BR" dirty="0"/>
+              <a:t>Para melhor desempenho do </a:t>
+            </a:r>
+            <a:r>
+              <a:rPr lang="pt-BR" b="1" dirty="0" err="1"/>
+              <a:t>next-fit</a:t>
+            </a:r>
+            <a:r>
+              <a:rPr lang="pt-BR" dirty="0"/>
+              <a:t>, garantimos que a primeira metade do trace, que possui as maiores requisições, poderia ser </a:t>
+            </a:r>
+            <a:r>
+              <a:rPr lang="pt-BR" b="1" dirty="0"/>
+              <a:t>concluída em uma única volta</a:t>
+            </a:r>
+            <a:r>
+              <a:rPr lang="pt-BR" dirty="0"/>
+              <a:t> na memória pelo </a:t>
+            </a:r>
+            <a:r>
+              <a:rPr lang="pt-BR" dirty="0" err="1"/>
+              <a:t>next</a:t>
+            </a:r>
+            <a:r>
+              <a:rPr lang="pt-BR" dirty="0"/>
+              <a:t>. Para tal, sempre haviam espaços disponíveis sequencialmente, o que favorece o </a:t>
+            </a:r>
+            <a:r>
+              <a:rPr lang="pt-BR" dirty="0" err="1"/>
+              <a:t>next</a:t>
+            </a:r>
+            <a:r>
+              <a:rPr lang="pt-BR" dirty="0"/>
+              <a:t> e torna o </a:t>
+            </a:r>
+            <a:r>
+              <a:rPr lang="pt-BR" dirty="0" err="1"/>
+              <a:t>first</a:t>
+            </a:r>
+            <a:r>
+              <a:rPr lang="pt-BR" dirty="0"/>
+              <a:t> bem menos eficiente</a:t>
+            </a:r>
+          </a:p>
+          <a:p>
+            <a:pPr>
+              <a:buFont typeface="Wingdings" pitchFamily="2" charset="2"/>
+              <a:buChar char="§"/>
+            </a:pPr>
+            <a:r>
+              <a:rPr lang="pt-BR" dirty="0"/>
+              <a:t>O </a:t>
+            </a:r>
+            <a:r>
+              <a:rPr lang="pt-BR" dirty="0" err="1"/>
+              <a:t>next-fit</a:t>
+            </a:r>
+            <a:r>
+              <a:rPr lang="pt-BR" dirty="0"/>
+              <a:t> foi </a:t>
+            </a:r>
+            <a:r>
+              <a:rPr lang="pt-BR" b="1" dirty="0"/>
+              <a:t>72% mais rápido </a:t>
+            </a:r>
+            <a:r>
+              <a:rPr lang="pt-BR" dirty="0"/>
+              <a:t>que o </a:t>
+            </a:r>
+            <a:r>
+              <a:rPr lang="pt-BR" dirty="0" err="1"/>
+              <a:t>first-fit</a:t>
+            </a:r>
+            <a:r>
+              <a:rPr lang="pt-BR" dirty="0"/>
+              <a:t>, mas este teve algumas falhas a menos</a:t>
+            </a:r>
+          </a:p>
+          <a:p>
+            <a:pPr>
+              <a:buFont typeface="Wingdings" pitchFamily="2" charset="2"/>
+              <a:buChar char="§"/>
+            </a:pPr>
+            <a:r>
+              <a:rPr lang="pt-BR" dirty="0"/>
+              <a:t>Em questão de falhas, o ponto inesperado é o baixo desempenho do </a:t>
+            </a:r>
+            <a:r>
+              <a:rPr lang="pt-BR" dirty="0" err="1"/>
+              <a:t>worst</a:t>
+            </a:r>
+            <a:r>
+              <a:rPr lang="pt-BR" dirty="0"/>
+              <a:t>. Isso ocorreu pois os maiores espaços foram ocupados muito rapidamente, gerando falhas na primeira metade do arquivo, de valores maiores que supunham espaço grande livre</a:t>
+            </a:r>
+          </a:p>
+        </p:txBody>
+      </p:sp>
+      <p:pic>
+        <p:nvPicPr>
+          <p:cNvPr id="6" name="Imagem 5">
+            <a:extLst>
+              <a:ext uri="{FF2B5EF4-FFF2-40B4-BE49-F238E27FC236}">
+                <a16:creationId xmlns:a16="http://schemas.microsoft.com/office/drawing/2014/main" id="{F522A2C1-68E3-B10E-BDE5-1B0FFB3B93C0}"/>
+              </a:ext>
+            </a:extLst>
+          </p:cNvPr>
+          <p:cNvPicPr>
+            <a:picLocks noChangeAspect="1"/>
+          </p:cNvPicPr>
+          <p:nvPr/>
+        </p:nvPicPr>
+        <p:blipFill>
+          <a:blip r:embed="rId2"/>
+          <a:stretch>
+            <a:fillRect/>
+          </a:stretch>
+        </p:blipFill>
+        <p:spPr>
+          <a:xfrm>
+            <a:off x="7697735" y="303816"/>
+            <a:ext cx="3951026" cy="3267436"/>
+          </a:xfrm>
+          <a:prstGeom prst="rect">
+            <a:avLst/>
+          </a:prstGeom>
+        </p:spPr>
+      </p:pic>
+      <p:pic>
+        <p:nvPicPr>
+          <p:cNvPr id="8" name="Imagem 7">
+            <a:extLst>
+              <a:ext uri="{FF2B5EF4-FFF2-40B4-BE49-F238E27FC236}">
+                <a16:creationId xmlns:a16="http://schemas.microsoft.com/office/drawing/2014/main" id="{B32E6794-8F8C-7CCB-A8BB-29AF146D5FAB}"/>
+              </a:ext>
+            </a:extLst>
+          </p:cNvPr>
+          <p:cNvPicPr>
+            <a:picLocks noChangeAspect="1"/>
+          </p:cNvPicPr>
+          <p:nvPr/>
+        </p:nvPicPr>
+        <p:blipFill>
+          <a:blip r:embed="rId3"/>
+          <a:stretch>
+            <a:fillRect/>
+          </a:stretch>
+        </p:blipFill>
+        <p:spPr>
+          <a:xfrm>
+            <a:off x="7697734" y="3513852"/>
+            <a:ext cx="3951026" cy="3344148"/>
+          </a:xfrm>
+          <a:prstGeom prst="rect">
+            <a:avLst/>
+          </a:prstGeom>
+        </p:spPr>
+      </p:pic>
+    </p:spTree>
+    <p:extLst>
+      <p:ext uri="{BB962C8B-B14F-4D97-AF65-F5344CB8AC3E}">
+        <p14:creationId xmlns:p14="http://schemas.microsoft.com/office/powerpoint/2010/main" val="972564502"/>
+      </p:ext>
+    </p:extLst>
+  </p:cSld>
+  <p:clrMapOvr>
+    <a:masterClrMapping/>
+  </p:clrMapOvr>
+</p:sld>
+</file>
+
+<file path=ppt/slides/slide9.xml><?xml version="1.0" encoding="utf-8"?>
+<p:sld xmlns:a="http://schemas.openxmlformats.org/drawingml/2006/main" xmlns:r="http://schemas.openxmlformats.org/officeDocument/2006/relationships" xmlns:p="http://schemas.openxmlformats.org/presentationml/2006/main">
+  <p:cSld>
+    <p:spTree>
+      <p:nvGrpSpPr>
+        <p:cNvPr id="1" name=""/>
+        <p:cNvGrpSpPr/>
+        <p:nvPr/>
+      </p:nvGrpSpPr>
+      <p:grpSpPr>
+        <a:xfrm>
+          <a:off x="0" y="0"/>
+          <a:ext cx="0" cy="0"/>
+          <a:chOff x="0" y="0"/>
+          <a:chExt cx="0" cy="0"/>
+        </a:xfrm>
+      </p:grpSpPr>
+      <p:sp>
+        <p:nvSpPr>
+          <p:cNvPr id="2" name="Título 1">
+            <a:extLst>
+              <a:ext uri="{FF2B5EF4-FFF2-40B4-BE49-F238E27FC236}">
+                <a16:creationId xmlns:a16="http://schemas.microsoft.com/office/drawing/2014/main" id="{CC8089CE-467D-F616-182F-F3429EDDCFC8}"/>
+              </a:ext>
+            </a:extLst>
+          </p:cNvPr>
+          <p:cNvSpPr>
+            <a:spLocks noGrp="1"/>
+          </p:cNvSpPr>
+          <p:nvPr>
+            <p:ph type="title"/>
+          </p:nvPr>
+        </p:nvSpPr>
+        <p:spPr/>
+        <p:txBody>
+          <a:bodyPr/>
+          <a:lstStyle/>
+          <a:p>
+            <a:r>
+              <a:rPr lang="pt-BR" dirty="0"/>
+              <a:t>Trace Best-</a:t>
+            </a:r>
+            <a:r>
+              <a:rPr lang="pt-BR" dirty="0" err="1"/>
+              <a:t>fit</a:t>
+            </a:r>
+            <a:endParaRPr lang="pt-BR" dirty="0"/>
+          </a:p>
+        </p:txBody>
+      </p:sp>
+      <p:sp>
+        <p:nvSpPr>
+          <p:cNvPr id="3" name="Espaço Reservado para Conteúdo 2">
+            <a:extLst>
+              <a:ext uri="{FF2B5EF4-FFF2-40B4-BE49-F238E27FC236}">
+                <a16:creationId xmlns:a16="http://schemas.microsoft.com/office/drawing/2014/main" id="{90DBA55B-6F5A-2DED-9574-FE692F115147}"/>
+              </a:ext>
+            </a:extLst>
+          </p:cNvPr>
+          <p:cNvSpPr>
+            <a:spLocks noGrp="1"/>
+          </p:cNvSpPr>
+          <p:nvPr>
+            <p:ph idx="1"/>
+          </p:nvPr>
+        </p:nvSpPr>
+        <p:spPr>
+          <a:xfrm>
+            <a:off x="612648" y="1114768"/>
+            <a:ext cx="6389426" cy="5475217"/>
+          </a:xfrm>
+        </p:spPr>
+        <p:txBody>
+          <a:bodyPr>
+            <a:normAutofit/>
+          </a:bodyPr>
+          <a:lstStyle/>
+          <a:p>
+            <a:pPr>
+              <a:buFont typeface="Wingdings" pitchFamily="2" charset="2"/>
+              <a:buChar char="§"/>
+            </a:pPr>
+            <a:r>
+              <a:rPr lang="pt-BR" dirty="0"/>
+              <a:t>Este trace faz requisições de todos os espaços livres, no valor total de cada espaço, na ordem crescente de tamanho</a:t>
+            </a:r>
+          </a:p>
+          <a:p>
+            <a:pPr>
+              <a:buFont typeface="Wingdings" pitchFamily="2" charset="2"/>
+              <a:buChar char="§"/>
+            </a:pPr>
+            <a:r>
+              <a:rPr lang="pt-BR" dirty="0"/>
+              <a:t>Essa abordagem garante que o </a:t>
+            </a:r>
+            <a:r>
+              <a:rPr lang="pt-BR" b="1" dirty="0" err="1"/>
+              <a:t>best-fit</a:t>
+            </a:r>
+            <a:r>
+              <a:rPr lang="pt-BR" dirty="0"/>
+              <a:t> sempre escolha um espaço de modo que, após a alocação, </a:t>
+            </a:r>
+            <a:r>
+              <a:rPr lang="pt-BR" b="1" dirty="0"/>
+              <a:t>não sobre espaço livre</a:t>
+            </a:r>
+            <a:r>
+              <a:rPr lang="pt-BR" dirty="0"/>
+              <a:t> nele. É o </a:t>
+            </a:r>
+            <a:r>
+              <a:rPr lang="pt-BR" b="1" dirty="0"/>
+              <a:t>cenário ideal</a:t>
+            </a:r>
+            <a:r>
+              <a:rPr lang="pt-BR" dirty="0"/>
+              <a:t> suposto pela premissa do </a:t>
+            </a:r>
+            <a:r>
+              <a:rPr lang="pt-BR" dirty="0" err="1"/>
+              <a:t>best-fit</a:t>
+            </a:r>
+            <a:endParaRPr lang="pt-BR" dirty="0"/>
+          </a:p>
+          <a:p>
+            <a:pPr>
+              <a:buFont typeface="Wingdings" pitchFamily="2" charset="2"/>
+              <a:buChar char="§"/>
+            </a:pPr>
+            <a:r>
+              <a:rPr lang="pt-BR" dirty="0"/>
+              <a:t>A partir de uma certa linha do arquivo, o </a:t>
+            </a:r>
+            <a:r>
+              <a:rPr lang="pt-BR" b="1" dirty="0" err="1"/>
+              <a:t>worst-fit</a:t>
+            </a:r>
+            <a:r>
+              <a:rPr lang="pt-BR" dirty="0"/>
+              <a:t> não conseguiu fazer mais </a:t>
+            </a:r>
+            <a:r>
+              <a:rPr lang="pt-BR" b="1" dirty="0"/>
+              <a:t>nenhuma alocação</a:t>
+            </a:r>
+            <a:r>
+              <a:rPr lang="pt-BR" dirty="0"/>
+              <a:t>, dado que sua premissa, de guardar espaço futuro para requisições pequenas/médias, é violada, tendo em vista que nunca haverá uma requisição menor do que a atual, apenas maiores ou iguais, para as quais já não haverá espaço disponível</a:t>
+            </a:r>
+          </a:p>
+        </p:txBody>
+      </p:sp>
+      <p:pic>
+        <p:nvPicPr>
+          <p:cNvPr id="5" name="Imagem 4">
+            <a:extLst>
+              <a:ext uri="{FF2B5EF4-FFF2-40B4-BE49-F238E27FC236}">
+                <a16:creationId xmlns:a16="http://schemas.microsoft.com/office/drawing/2014/main" id="{266ADCAB-BA3D-4846-9B8F-353CAC8E50C1}"/>
+              </a:ext>
+            </a:extLst>
+          </p:cNvPr>
+          <p:cNvPicPr>
+            <a:picLocks noChangeAspect="1"/>
+          </p:cNvPicPr>
+          <p:nvPr/>
+        </p:nvPicPr>
+        <p:blipFill>
+          <a:blip r:embed="rId2"/>
+          <a:stretch>
+            <a:fillRect/>
+          </a:stretch>
+        </p:blipFill>
+        <p:spPr>
+          <a:xfrm>
+            <a:off x="7697734" y="307759"/>
+            <a:ext cx="3951026" cy="3250586"/>
+          </a:xfrm>
+          <a:prstGeom prst="rect">
+            <a:avLst/>
+          </a:prstGeom>
+        </p:spPr>
+      </p:pic>
+      <p:pic>
+        <p:nvPicPr>
+          <p:cNvPr id="9" name="Imagem 8">
+            <a:extLst>
+              <a:ext uri="{FF2B5EF4-FFF2-40B4-BE49-F238E27FC236}">
+                <a16:creationId xmlns:a16="http://schemas.microsoft.com/office/drawing/2014/main" id="{AF5826B2-0610-8D78-2AC3-B9E389BE02EA}"/>
+              </a:ext>
+            </a:extLst>
+          </p:cNvPr>
+          <p:cNvPicPr>
+            <a:picLocks noChangeAspect="1"/>
+          </p:cNvPicPr>
+          <p:nvPr/>
+        </p:nvPicPr>
+        <p:blipFill>
+          <a:blip r:embed="rId3"/>
+          <a:stretch>
+            <a:fillRect/>
+          </a:stretch>
+        </p:blipFill>
+        <p:spPr>
+          <a:xfrm>
+            <a:off x="7697734" y="3428999"/>
+            <a:ext cx="3951026" cy="3394722"/>
+          </a:xfrm>
+          <a:prstGeom prst="rect">
+            <a:avLst/>
+          </a:prstGeom>
+        </p:spPr>
+      </p:pic>
+    </p:spTree>
+    <p:extLst>
+      <p:ext uri="{BB962C8B-B14F-4D97-AF65-F5344CB8AC3E}">
+        <p14:creationId xmlns:p14="http://schemas.microsoft.com/office/powerpoint/2010/main" val="2505817447"/>
       </p:ext>
     </p:extLst>
   </p:cSld>
